--- a/docs/customer-documents/federal-aan-series/Vol_VII_Book_01_FedAAN_CMDB_Reconciliation_Asset_Identity.pptx
+++ b/docs/customer-documents/federal-aan-series/Vol_VII_Book_01_FedAAN_CMDB_Reconciliation_Asset_Identity.pptx
@@ -515,7 +515,7 @@
           <a:p/>
           <a:p>
             <a:r>
-              <a:t>Vendor sources: uiao repo: inbox/Application Aware Networking/Vol_I_Book_01_FedAAN_SSA_Landing_Zone_IPAM_FedRAMP.qmd</a:t>
+              <a:t>Vendor sources: host repo: docs/customer-documents/federal-aan-series/Vol_I_Book_01_FedAAN_SSA_Landing_Zone_IPAM_FedRAMP.qmd</a:t>
             </a:r>
           </a:p>
         </p:txBody>
